--- a/docs/slides/AGJ_dynamics_2026-08-17.pptx
+++ b/docs/slides/AGJ_dynamics_2026-08-17.pptx
@@ -19,6 +19,7 @@
     <p:sldId id="267" r:id="rId18"/>
     <p:sldId id="268" r:id="rId19"/>
     <p:sldId id="269" r:id="rId20"/>
+    <p:sldId id="270" r:id="rId21"/>
   </p:sldIdLst>
   <p:sldSz cx="12191695" cy="6858000" type="screen4x3"/>
   <p:notesSz cx="6858000" cy="9144000"/>
@@ -3640,7 +3641,7 @@
                 </a:solidFill>
                 <a:latin typeface="Hiragino Sans"/>
               </a:rPr>
-              <a:t>01 / 14   出典付き・帳簿駆動・全再現可能(regenerate_all)</a:t>
+              <a:t>01 / 15   出典付き・帳簿駆動・全再現可能(regenerate_all)</a:t>
             </a:r>
           </a:p>
         </p:txBody>
@@ -3741,99 +3742,21 @@
                 </a:solidFill>
                 <a:latin typeface="Hiragino Sans"/>
               </a:rPr>
-              <a:t>方法論  トポロジをどう作ったか</a:t>
-            </a:r>
-          </a:p>
-        </p:txBody>
-      </p:sp>
-      <p:sp>
-        <p:nvSpPr>
-          <p:cNvPr id="4" name="TextBox 3"/>
-          <p:cNvSpPr txBox="1"/>
-          <p:nvPr/>
-        </p:nvSpPr>
-        <p:spPr>
-          <a:xfrm>
-            <a:off x="548640" y="640080"/>
-            <a:ext cx="5852160" cy="640080"/>
-          </a:xfrm>
-          <a:prstGeom prst="rect">
-            <a:avLst/>
-          </a:prstGeom>
-          <a:noFill/>
-        </p:spPr>
-        <p:txBody>
-          <a:bodyPr wrap="square">
-            <a:spAutoFit/>
-          </a:bodyPr>
-          <a:lstStyle/>
-          <a:p>
-            <a:pPr algn="l">
-              <a:lnSpc>
-                <a:spcPct val="125000"/>
-              </a:lnSpc>
-            </a:pPr>
-            <a:r>
-              <a:rPr sz="2200" b="1">
-                <a:solidFill>
-                  <a:srgbClr val="E9EDF2"/>
-                </a:solidFill>
-                <a:latin typeface="Hiragino Sans"/>
-              </a:rPr>
-              <a:t>EGGC — 証拠ゲート付き系統コンフレーション</a:t>
-            </a:r>
-          </a:p>
-        </p:txBody>
-      </p:sp>
-      <p:sp>
-        <p:nvSpPr>
-          <p:cNvPr id="5" name="TextBox 4"/>
-          <p:cNvSpPr txBox="1"/>
-          <p:nvPr/>
-        </p:nvSpPr>
-        <p:spPr>
-          <a:xfrm>
-            <a:off x="548640" y="1371600"/>
-            <a:ext cx="5669280" cy="822960"/>
-          </a:xfrm>
-          <a:prstGeom prst="rect">
-            <a:avLst/>
-          </a:prstGeom>
-          <a:noFill/>
-        </p:spPr>
-        <p:txBody>
-          <a:bodyPr wrap="square">
-            <a:spAutoFit/>
-          </a:bodyPr>
-          <a:lstStyle/>
-          <a:p>
-            <a:pPr algn="l">
-              <a:lnSpc>
-                <a:spcPct val="125000"/>
-              </a:lnSpc>
-            </a:pPr>
-            <a:r>
-              <a:rPr sz="1300" b="0">
-                <a:solidFill>
-                  <a:srgbClr val="E9EDF2"/>
-                </a:solidFill>
-                <a:latin typeface="Hiragino Sans"/>
-              </a:rPr>
-              <a:t>公表資料の「論理接続(直線)」をOSMの「物理線形」へ写像。核心は採否を証拠でゲートすること:</a:t>
-            </a:r>
-          </a:p>
-        </p:txBody>
-      </p:sp>
-      <p:sp>
-        <p:nvSpPr>
-          <p:cNvPr id="6" name="Rectangle 5"/>
+              <a:t>ヘッドライン</a:t>
+            </a:r>
+          </a:p>
+        </p:txBody>
+      </p:sp>
+      <p:sp>
+        <p:nvSpPr>
+          <p:cNvPr id="4" name="Rectangle 3"/>
           <p:cNvSpPr/>
           <p:nvPr/>
         </p:nvSpPr>
         <p:spPr>
           <a:xfrm>
-            <a:off x="548640" y="2286000"/>
-            <a:ext cx="5669280" cy="1207008"/>
+            <a:off x="731520" y="1463040"/>
+            <a:ext cx="10698480" cy="2377440"/>
           </a:xfrm>
           <a:prstGeom prst="rect">
             <a:avLst/>
@@ -3863,43 +3786,68 @@
           </a:fontRef>
         </p:style>
         <p:txBody>
-          <a:bodyPr rtlCol="0" anchor="ctr" wrap="square" lIns="228600" tIns="109728"/>
-          <a:lstStyle/>
-          <a:p>
-            <a:pPr algn="ctr"/>
-            <a:r>
-              <a:rPr sz="1600" b="1">
+          <a:bodyPr rtlCol="0" anchor="ctr" wrap="square" lIns="365760" tIns="320040"/>
+          <a:lstStyle/>
+          <a:p>
+            <a:pPr algn="ctr">
+              <a:lnSpc>
+                <a:spcPct val="135000"/>
+              </a:lnSpc>
+            </a:pPr>
+            <a:r>
+              <a:rPr sz="2400" b="1">
+                <a:solidFill>
+                  <a:srgbClr val="E9EDF2"/>
+                </a:solidFill>
+                <a:latin typeface="Hiragino Sans"/>
+              </a:rPr>
+              <a:t>公開データのみから構築した全国送電網モデルが、</a:t>
+            </a:r>
+          </a:p>
+          <a:p>
+            <a:pPr>
+              <a:lnSpc>
+                <a:spcPct val="135000"/>
+              </a:lnSpc>
+            </a:pPr>
+            <a:r>
+              <a:rPr sz="2400" b="1">
                 <a:solidFill>
                   <a:srgbClr val="E0A13A"/>
                 </a:solidFill>
-                <a:latin typeface="Cambria Math"/>
-              </a:rPr>
-              <a:t>off-main比率 = 浮いた断片の長さ / 経路総延長</a:t>
-            </a:r>
-          </a:p>
-          <a:p>
-            <a:r>
-              <a:rPr sz="1050">
-                <a:solidFill>
-                  <a:srgbClr val="8FA0B2"/>
-                </a:solidFill>
-                <a:latin typeface="Hiragino Sans"/>
-              </a:rPr>
-              <a:t>≥0.7 → 断片こそ公表線そのもの → 実線形に吸着 / &lt;0.3や経路なし → 直線を保持(存在しない線形を捏造しない)</a:t>
-            </a:r>
-          </a:p>
-        </p:txBody>
-      </p:sp>
-      <p:sp>
-        <p:nvSpPr>
-          <p:cNvPr id="7" name="TextBox 6"/>
+                <a:latin typeface="Hiragino Sans"/>
+              </a:rPr>
+              <a:t>実測で知られる西日本長軸振動(約0.4Hz)の</a:t>
+            </a:r>
+          </a:p>
+          <a:p>
+            <a:pPr>
+              <a:lnSpc>
+                <a:spcPct val="135000"/>
+              </a:lnSpc>
+            </a:pPr>
+            <a:r>
+              <a:rPr sz="2400" b="1">
+                <a:solidFill>
+                  <a:srgbClr val="E9EDF2"/>
+                </a:solidFill>
+                <a:latin typeface="Hiragino Sans"/>
+              </a:rPr>
+              <a:t>周波数と地理形状を再現した。</a:t>
+            </a:r>
+          </a:p>
+        </p:txBody>
+      </p:sp>
+      <p:sp>
+        <p:nvSpPr>
+          <p:cNvPr id="5" name="TextBox 4"/>
           <p:cNvSpPr txBox="1"/>
           <p:nvPr/>
         </p:nvSpPr>
         <p:spPr>
           <a:xfrm>
-            <a:off x="548640" y="3794760"/>
-            <a:ext cx="5669280" cy="1280160"/>
+            <a:off x="777240" y="4114800"/>
+            <a:ext cx="10515600" cy="548640"/>
           </a:xfrm>
           <a:prstGeom prst="rect">
             <a:avLst/>
@@ -3918,67 +3866,27 @@
               </a:lnSpc>
             </a:pPr>
             <a:r>
-              <a:rPr sz="1150" b="0">
+              <a:rPr sz="1300" b="0">
                 <a:solidFill>
                   <a:srgbClr val="8FA0B2"/>
                 </a:solidFill>
                 <a:latin typeface="Hiragino Sans"/>
               </a:rPr>
-              <a:t>系譜: HMMマップマッチング(Newson &amp; Krumm 2009)・地図コンフレーション(Saalfeld 1988)・GridKit系(逆方向)。</a:t>
-            </a:r>
-          </a:p>
-          <a:p>
-            <a:pPr algn="l">
-              <a:lnSpc>
-                <a:spcPct val="125000"/>
-              </a:lnSpc>
-            </a:pPr>
-            <a:r>
-              <a:rPr sz="1150" b="0">
-                <a:solidFill>
-                  <a:srgbClr val="8FA0B2"/>
-                </a:solidFill>
-                <a:latin typeface="Hiragino Sans"/>
-              </a:rPr>
-              <a:t>公表論理エッジを入力とし、検証可能な採否基準を持つ点が新規。全接続は帳簿駆動(217本)・可逆。</a:t>
-            </a:r>
-          </a:p>
-        </p:txBody>
-      </p:sp>
-      <p:pic>
-        <p:nvPicPr>
-          <p:cNvPr id="8" name="Picture 7" descr="fig_ybus_compare_slide.jpg"/>
-          <p:cNvPicPr>
-            <a:picLocks noChangeAspect="1"/>
-          </p:cNvPicPr>
-          <p:nvPr/>
-        </p:nvPicPr>
-        <p:blipFill>
-          <a:blip r:embed="rId2"/>
-          <a:stretch>
-            <a:fillRect/>
-          </a:stretch>
-        </p:blipFill>
-        <p:spPr>
-          <a:xfrm>
-            <a:off x="6400800" y="1737360"/>
-            <a:ext cx="5394960" cy="2805379"/>
-          </a:xfrm>
-          <a:prstGeom prst="rect">
-            <a:avLst/>
-          </a:prstGeom>
-        </p:spPr>
-      </p:pic>
-      <p:sp>
-        <p:nvSpPr>
-          <p:cNvPr id="9" name="TextBox 8"/>
+              <a:t>周波数だけでなく「九州⇔中部・関西の逆位相」という形まで一致 — トポロジ・インピーダンス・慣性配置がまとめて本物らしいことの証明。</a:t>
+            </a:r>
+          </a:p>
+        </p:txBody>
+      </p:sp>
+      <p:sp>
+        <p:nvSpPr>
+          <p:cNvPr id="6" name="TextBox 5"/>
           <p:cNvSpPr txBox="1"/>
           <p:nvPr/>
         </p:nvSpPr>
         <p:spPr>
           <a:xfrm>
-            <a:off x="6400800" y="4754880"/>
-            <a:ext cx="5394960" cy="457200"/>
+            <a:off x="548640" y="4937760"/>
+            <a:ext cx="2743200" cy="640080"/>
           </a:xfrm>
           <a:prstGeom prst="rect">
             <a:avLst/>
@@ -3997,27 +3905,27 @@
               </a:lnSpc>
             </a:pPr>
             <a:r>
-              <a:rPr sz="1100" b="0">
-                <a:solidFill>
-                  <a:srgbClr val="8FA0B2"/>
-                </a:solidFill>
-                <a:latin typeface="Hiragino Sans"/>
-              </a:rPr>
-              <a:t>Ybus疎行列構造: OSM再抽出の前後で結線+7.1%・疎性(帯構造)は不変</a:t>
-            </a:r>
-          </a:p>
-        </p:txBody>
-      </p:sp>
-      <p:sp>
-        <p:nvSpPr>
-          <p:cNvPr id="10" name="TextBox 9"/>
+              <a:rPr sz="2600" b="1">
+                <a:solidFill>
+                  <a:srgbClr val="4F9FD8"/>
+                </a:solidFill>
+                <a:latin typeface="Hiragino Sans"/>
+              </a:rPr>
+              <a:t>0.434 Hz</a:t>
+            </a:r>
+          </a:p>
+        </p:txBody>
+      </p:sp>
+      <p:sp>
+        <p:nvSpPr>
+          <p:cNvPr id="7" name="TextBox 6"/>
           <p:cNvSpPr txBox="1"/>
           <p:nvPr/>
         </p:nvSpPr>
         <p:spPr>
           <a:xfrm>
-            <a:off x="548640" y="6419088"/>
-            <a:ext cx="11155680" cy="365760"/>
+            <a:off x="548640" y="5532120"/>
+            <a:ext cx="2743200" cy="365760"/>
           </a:xfrm>
           <a:prstGeom prst="rect">
             <a:avLst/>
@@ -4036,13 +3944,208 @@
               </a:lnSpc>
             </a:pPr>
             <a:r>
+              <a:rPr sz="1200" b="0">
+                <a:solidFill>
+                  <a:srgbClr val="8FA0B2"/>
+                </a:solidFill>
+                <a:latin typeface="Hiragino Sans"/>
+              </a:rPr>
+              <a:t>west 最低モード(文献≈0.4Hz)</a:t>
+            </a:r>
+          </a:p>
+        </p:txBody>
+      </p:sp>
+      <p:sp>
+        <p:nvSpPr>
+          <p:cNvPr id="8" name="TextBox 7"/>
+          <p:cNvSpPr txBox="1"/>
+          <p:nvPr/>
+        </p:nvSpPr>
+        <p:spPr>
+          <a:xfrm>
+            <a:off x="4297679" y="4937760"/>
+            <a:ext cx="2743200" cy="640080"/>
+          </a:xfrm>
+          <a:prstGeom prst="rect">
+            <a:avLst/>
+          </a:prstGeom>
+          <a:noFill/>
+        </p:spPr>
+        <p:txBody>
+          <a:bodyPr wrap="square">
+            <a:spAutoFit/>
+          </a:bodyPr>
+          <a:lstStyle/>
+          <a:p>
+            <a:pPr algn="l">
+              <a:lnSpc>
+                <a:spcPct val="125000"/>
+              </a:lnSpc>
+            </a:pPr>
+            <a:r>
+              <a:rPr sz="2600" b="1">
+                <a:solidFill>
+                  <a:srgbClr val="E4572E"/>
+                </a:solidFill>
+                <a:latin typeface="Hiragino Sans"/>
+              </a:rPr>
+              <a:t>0.592 Hz</a:t>
+            </a:r>
+          </a:p>
+        </p:txBody>
+      </p:sp>
+      <p:sp>
+        <p:nvSpPr>
+          <p:cNvPr id="9" name="TextBox 8"/>
+          <p:cNvSpPr txBox="1"/>
+          <p:nvPr/>
+        </p:nvSpPr>
+        <p:spPr>
+          <a:xfrm>
+            <a:off x="4297679" y="5532120"/>
+            <a:ext cx="2743200" cy="365760"/>
+          </a:xfrm>
+          <a:prstGeom prst="rect">
+            <a:avLst/>
+          </a:prstGeom>
+          <a:noFill/>
+        </p:spPr>
+        <p:txBody>
+          <a:bodyPr wrap="square">
+            <a:spAutoFit/>
+          </a:bodyPr>
+          <a:lstStyle/>
+          <a:p>
+            <a:pPr algn="l">
+              <a:lnSpc>
+                <a:spcPct val="125000"/>
+              </a:lnSpc>
+            </a:pPr>
+            <a:r>
+              <a:rPr sz="1200" b="0">
+                <a:solidFill>
+                  <a:srgbClr val="8FA0B2"/>
+                </a:solidFill>
+                <a:latin typeface="Hiragino Sans"/>
+              </a:rPr>
+              <a:t>east 最低モード(東北⇔関東)</a:t>
+            </a:r>
+          </a:p>
+        </p:txBody>
+      </p:sp>
+      <p:sp>
+        <p:nvSpPr>
+          <p:cNvPr id="10" name="TextBox 9"/>
+          <p:cNvSpPr txBox="1"/>
+          <p:nvPr/>
+        </p:nvSpPr>
+        <p:spPr>
+          <a:xfrm>
+            <a:off x="8046719" y="4937760"/>
+            <a:ext cx="2743200" cy="640080"/>
+          </a:xfrm>
+          <a:prstGeom prst="rect">
+            <a:avLst/>
+          </a:prstGeom>
+          <a:noFill/>
+        </p:spPr>
+        <p:txBody>
+          <a:bodyPr wrap="square">
+            <a:spAutoFit/>
+          </a:bodyPr>
+          <a:lstStyle/>
+          <a:p>
+            <a:pPr algn="l">
+              <a:lnSpc>
+                <a:spcPct val="125000"/>
+              </a:lnSpc>
+            </a:pPr>
+            <a:r>
+              <a:rPr sz="2600" b="1">
+                <a:solidFill>
+                  <a:srgbClr val="E0A13A"/>
+                </a:solidFill>
+                <a:latin typeface="Hiragino Sans"/>
+              </a:rPr>
+              <a:t>409機</a:t>
+            </a:r>
+          </a:p>
+        </p:txBody>
+      </p:sp>
+      <p:sp>
+        <p:nvSpPr>
+          <p:cNvPr id="11" name="TextBox 10"/>
+          <p:cNvSpPr txBox="1"/>
+          <p:nvPr/>
+        </p:nvSpPr>
+        <p:spPr>
+          <a:xfrm>
+            <a:off x="8046719" y="5532120"/>
+            <a:ext cx="2743200" cy="365760"/>
+          </a:xfrm>
+          <a:prstGeom prst="rect">
+            <a:avLst/>
+          </a:prstGeom>
+          <a:noFill/>
+        </p:spPr>
+        <p:txBody>
+          <a:bodyPr wrap="square">
+            <a:spAutoFit/>
+          </a:bodyPr>
+          <a:lstStyle/>
+          <a:p>
+            <a:pPr algn="l">
+              <a:lnSpc>
+                <a:spcPct val="125000"/>
+              </a:lnSpc>
+            </a:pPr>
+            <a:r>
+              <a:rPr sz="1200" b="0">
+                <a:solidFill>
+                  <a:srgbClr val="8FA0B2"/>
+                </a:solidFill>
+                <a:latin typeface="Hiragino Sans"/>
+              </a:rPr>
+              <a:t>west 同期機(集約後)</a:t>
+            </a:r>
+          </a:p>
+        </p:txBody>
+      </p:sp>
+      <p:sp>
+        <p:nvSpPr>
+          <p:cNvPr id="12" name="TextBox 11"/>
+          <p:cNvSpPr txBox="1"/>
+          <p:nvPr/>
+        </p:nvSpPr>
+        <p:spPr>
+          <a:xfrm>
+            <a:off x="548640" y="6419088"/>
+            <a:ext cx="11155680" cy="365760"/>
+          </a:xfrm>
+          <a:prstGeom prst="rect">
+            <a:avLst/>
+          </a:prstGeom>
+          <a:noFill/>
+        </p:spPr>
+        <p:txBody>
+          <a:bodyPr wrap="square">
+            <a:spAutoFit/>
+          </a:bodyPr>
+          <a:lstStyle/>
+          <a:p>
+            <a:pPr algn="l">
+              <a:lnSpc>
+                <a:spcPct val="125000"/>
+              </a:lnSpc>
+            </a:pPr>
+            <a:r>
               <a:rPr sz="1000" b="0">
                 <a:solidFill>
                   <a:srgbClr val="8FA0B2"/>
                 </a:solidFill>
                 <a:latin typeface="Hiragino Sans"/>
               </a:rPr>
-              <a:t>10 / 14   route_disclosure_edges.py / apply_disclosure_v2.py</a:t>
+              <a:t>10 / 15   再現: PYTHONPATH=. python3 scripts/gen_swing_map.py</a:t>
             </a:r>
           </a:p>
         </p:txBody>
@@ -4143,7 +4246,7 @@
                 </a:solidFill>
                 <a:latin typeface="Hiragino Sans"/>
               </a:rPr>
-              <a:t>誠実性</a:t>
+              <a:t>方法論  トポロジをどう作ったか</a:t>
             </a:r>
           </a:p>
         </p:txBody>
@@ -4157,7 +4260,7 @@
         <p:spPr>
           <a:xfrm>
             <a:off x="548640" y="640080"/>
-            <a:ext cx="10972800" cy="640080"/>
+            <a:ext cx="5852160" cy="640080"/>
           </a:xfrm>
           <a:prstGeom prst="rect">
             <a:avLst/>
@@ -4176,13 +4279,13 @@
               </a:lnSpc>
             </a:pPr>
             <a:r>
-              <a:rPr sz="2800" b="1">
+              <a:rPr sz="2200" b="1">
                 <a:solidFill>
                   <a:srgbClr val="E9EDF2"/>
                 </a:solidFill>
                 <a:latin typeface="Hiragino Sans"/>
               </a:rPr>
-              <a:t>滑らかさは、検証の証拠ではない</a:t>
+              <a:t>EGGC — 証拠ゲート付き系統コンフレーション</a:t>
             </a:r>
           </a:p>
         </p:txBody>
@@ -4195,8 +4298,8 @@
         </p:nvSpPr>
         <p:spPr>
           <a:xfrm>
-            <a:off x="548640" y="1463040"/>
-            <a:ext cx="10972800" cy="548640"/>
+            <a:off x="548640" y="1371600"/>
+            <a:ext cx="5669280" cy="822960"/>
           </a:xfrm>
           <a:prstGeom prst="rect">
             <a:avLst/>
@@ -4215,27 +4318,93 @@
               </a:lnSpc>
             </a:pPr>
             <a:r>
-              <a:rPr sz="1400" b="0">
+              <a:rPr sz="1300" b="0">
+                <a:solidFill>
+                  <a:srgbClr val="E9EDF2"/>
+                </a:solidFill>
+                <a:latin typeface="Hiragino Sans"/>
+              </a:rPr>
+              <a:t>公表資料の「論理接続(直線)」をOSMの「物理線形」へ写像。核心は採否を証拠でゲートすること:</a:t>
+            </a:r>
+          </a:p>
+        </p:txBody>
+      </p:sp>
+      <p:sp>
+        <p:nvSpPr>
+          <p:cNvPr id="6" name="Rectangle 5"/>
+          <p:cNvSpPr/>
+          <p:nvPr/>
+        </p:nvSpPr>
+        <p:spPr>
+          <a:xfrm>
+            <a:off x="548640" y="2286000"/>
+            <a:ext cx="5669280" cy="1207008"/>
+          </a:xfrm>
+          <a:prstGeom prst="rect">
+            <a:avLst/>
+          </a:prstGeom>
+          <a:solidFill>
+            <a:srgbClr val="18222E"/>
+          </a:solidFill>
+          <a:ln>
+            <a:solidFill>
+              <a:srgbClr val="26374A"/>
+            </a:solidFill>
+          </a:ln>
+          <a:effectLst/>
+        </p:spPr>
+        <p:style>
+          <a:lnRef idx="1">
+            <a:schemeClr val="accent1"/>
+          </a:lnRef>
+          <a:fillRef idx="3">
+            <a:schemeClr val="accent1"/>
+          </a:fillRef>
+          <a:effectRef idx="2">
+            <a:schemeClr val="accent1"/>
+          </a:effectRef>
+          <a:fontRef idx="minor">
+            <a:schemeClr val="lt1"/>
+          </a:fontRef>
+        </p:style>
+        <p:txBody>
+          <a:bodyPr rtlCol="0" anchor="ctr" wrap="square" lIns="228600" tIns="109728"/>
+          <a:lstStyle/>
+          <a:p>
+            <a:pPr algn="ctr"/>
+            <a:r>
+              <a:rPr sz="1600" b="1">
+                <a:solidFill>
+                  <a:srgbClr val="E0A13A"/>
+                </a:solidFill>
+                <a:latin typeface="Cambria Math"/>
+              </a:rPr>
+              <a:t>off-main比率 = 浮いた断片の長さ / 経路総延長</a:t>
+            </a:r>
+          </a:p>
+          <a:p>
+            <a:r>
+              <a:rPr sz="1050">
                 <a:solidFill>
                   <a:srgbClr val="8FA0B2"/>
                 </a:solidFill>
                 <a:latin typeface="Hiragino Sans"/>
               </a:rPr>
-              <a:t>完成品の見栄えは「仮定を重ねた推定」を「実在の観測」と誤認させる。だから仮定の全量を1枚の台帳で見えるようにする。</a:t>
-            </a:r>
-          </a:p>
-        </p:txBody>
-      </p:sp>
-      <p:sp>
-        <p:nvSpPr>
-          <p:cNvPr id="6" name="TextBox 5"/>
+              <a:t>≥0.7 → 断片こそ公表線そのもの → 実線形に吸着 / &lt;0.3や経路なし → 直線を保持(存在しない線形を捏造しない)</a:t>
+            </a:r>
+          </a:p>
+        </p:txBody>
+      </p:sp>
+      <p:sp>
+        <p:nvSpPr>
+          <p:cNvPr id="7" name="TextBox 6"/>
           <p:cNvSpPr txBox="1"/>
           <p:nvPr/>
         </p:nvSpPr>
         <p:spPr>
           <a:xfrm>
-            <a:off x="548640" y="2286000"/>
-            <a:ext cx="10972800" cy="3657600"/>
+            <a:off x="548640" y="3794760"/>
+            <a:ext cx="5669280" cy="1280160"/>
           </a:xfrm>
           <a:prstGeom prst="rect">
             <a:avLst/>
@@ -4248,97 +4417,73 @@
           </a:bodyPr>
           <a:lstStyle/>
           <a:p>
-            <a:pPr>
-              <a:lnSpc>
-                <a:spcPct val="130000"/>
-              </a:lnSpc>
-            </a:pPr>
-            <a:r>
-              <a:rPr sz="1400">
-                <a:solidFill>
-                  <a:srgbClr val="E9EDF2"/>
-                </a:solidFill>
-                <a:latin typeface="Hiragino Sans"/>
-              </a:rPr>
-              <a:t>・介入台帳 — 接続・値・配分を作る介入30件すべてを ①根拠 ②帳簿 ③無効化手段 の3点セットで登録(登録なき介入は禁止)</a:t>
-            </a:r>
-          </a:p>
-          <a:p>
-            <a:pPr>
-              <a:lnSpc>
-                <a:spcPct val="130000"/>
-              </a:lnSpc>
-            </a:pPr>
-            <a:r>
-              <a:rPr sz="1400">
-                <a:solidFill>
-                  <a:srgbClr val="E9EDF2"/>
-                </a:solidFill>
-                <a:latin typeface="Hiragino Sans"/>
-              </a:rPr>
-              <a:t>・出典必須 — 容量・接続は出典URL+原文引用がないものをREJECT。動的定数は「型式別典型値・個別実測でない」と列で明示</a:t>
-            </a:r>
-          </a:p>
-          <a:p>
-            <a:pPr>
-              <a:lnSpc>
-                <a:spcPct val="130000"/>
-              </a:lnSpc>
-            </a:pPr>
-            <a:r>
-              <a:rPr sz="1400">
-                <a:solidFill>
-                  <a:srgbClr val="E9EDF2"/>
-                </a:solidFill>
-                <a:latin typeface="Hiragino Sans"/>
-              </a:rPr>
-              <a:t>・負の結果 — 失敗・棄却した仮説も検証図つきで報告に残す</a:t>
-            </a:r>
-          </a:p>
-          <a:p>
-            <a:pPr>
-              <a:lnSpc>
-                <a:spcPct val="130000"/>
-              </a:lnSpc>
-            </a:pPr>
-            <a:r>
-              <a:rPr sz="1400">
-                <a:solidFill>
-                  <a:srgbClr val="E9EDF2"/>
-                </a:solidFill>
-                <a:latin typeface="Hiragino Sans"/>
-              </a:rPr>
-              <a:t>・A/B保留 — 効果が測れない改良は採用しない(例: 地点需要ピン留め=害なし・カバレッジ0.3%で保留)</a:t>
-            </a:r>
-          </a:p>
-          <a:p>
-            <a:pPr>
-              <a:lnSpc>
-                <a:spcPct val="130000"/>
-              </a:lnSpc>
-            </a:pPr>
-            <a:r>
-              <a:rPr sz="1400">
-                <a:solidFill>
-                  <a:srgbClr val="E9EDF2"/>
-                </a:solidFill>
-                <a:latin typeface="Hiragino Sans"/>
-              </a:rPr>
-              <a:t>・近似の明示 — 長軸振動は「帯と形の再現」。減衰率の定量にはAVR/PSS/ガバナの制御系モデルが要る(未実装と明記)</a:t>
-            </a:r>
-          </a:p>
-        </p:txBody>
-      </p:sp>
-      <p:sp>
-        <p:nvSpPr>
-          <p:cNvPr id="7" name="TextBox 6"/>
+            <a:pPr algn="l">
+              <a:lnSpc>
+                <a:spcPct val="125000"/>
+              </a:lnSpc>
+            </a:pPr>
+            <a:r>
+              <a:rPr sz="1150" b="0">
+                <a:solidFill>
+                  <a:srgbClr val="8FA0B2"/>
+                </a:solidFill>
+                <a:latin typeface="Hiragino Sans"/>
+              </a:rPr>
+              <a:t>系譜: HMMマップマッチング(Newson &amp; Krumm 2009)・地図コンフレーション(Saalfeld 1988)・GridKit系(逆方向)。</a:t>
+            </a:r>
+          </a:p>
+          <a:p>
+            <a:pPr algn="l">
+              <a:lnSpc>
+                <a:spcPct val="125000"/>
+              </a:lnSpc>
+            </a:pPr>
+            <a:r>
+              <a:rPr sz="1150" b="0">
+                <a:solidFill>
+                  <a:srgbClr val="8FA0B2"/>
+                </a:solidFill>
+                <a:latin typeface="Hiragino Sans"/>
+              </a:rPr>
+              <a:t>公表論理エッジを入力とし、検証可能な採否基準を持つ点が新規。全接続は帳簿駆動(217本)・可逆。</a:t>
+            </a:r>
+          </a:p>
+        </p:txBody>
+      </p:sp>
+      <p:pic>
+        <p:nvPicPr>
+          <p:cNvPr id="8" name="Picture 7" descr="fig_ybus_compare_slide.jpg"/>
+          <p:cNvPicPr>
+            <a:picLocks noChangeAspect="1"/>
+          </p:cNvPicPr>
+          <p:nvPr/>
+        </p:nvPicPr>
+        <p:blipFill>
+          <a:blip r:embed="rId2"/>
+          <a:stretch>
+            <a:fillRect/>
+          </a:stretch>
+        </p:blipFill>
+        <p:spPr>
+          <a:xfrm>
+            <a:off x="6400800" y="1737360"/>
+            <a:ext cx="5394960" cy="2805379"/>
+          </a:xfrm>
+          <a:prstGeom prst="rect">
+            <a:avLst/>
+          </a:prstGeom>
+        </p:spPr>
+      </p:pic>
+      <p:sp>
+        <p:nvSpPr>
+          <p:cNvPr id="9" name="TextBox 8"/>
           <p:cNvSpPr txBox="1"/>
           <p:nvPr/>
         </p:nvSpPr>
         <p:spPr>
           <a:xfrm>
-            <a:off x="548640" y="6419088"/>
-            <a:ext cx="11155680" cy="365760"/>
+            <a:off x="6400800" y="4754880"/>
+            <a:ext cx="5394960" cy="457200"/>
           </a:xfrm>
           <a:prstGeom prst="rect">
             <a:avLst/>
@@ -4357,13 +4502,52 @@
               </a:lnSpc>
             </a:pPr>
             <a:r>
+              <a:rPr sz="1100" b="0">
+                <a:solidFill>
+                  <a:srgbClr val="8FA0B2"/>
+                </a:solidFill>
+                <a:latin typeface="Hiragino Sans"/>
+              </a:rPr>
+              <a:t>Ybus疎行列構造: OSM再抽出の前後で結線+7.1%・疎性(帯構造)は不変</a:t>
+            </a:r>
+          </a:p>
+        </p:txBody>
+      </p:sp>
+      <p:sp>
+        <p:nvSpPr>
+          <p:cNvPr id="10" name="TextBox 9"/>
+          <p:cNvSpPr txBox="1"/>
+          <p:nvPr/>
+        </p:nvSpPr>
+        <p:spPr>
+          <a:xfrm>
+            <a:off x="548640" y="6419088"/>
+            <a:ext cx="11155680" cy="365760"/>
+          </a:xfrm>
+          <a:prstGeom prst="rect">
+            <a:avLst/>
+          </a:prstGeom>
+          <a:noFill/>
+        </p:spPr>
+        <p:txBody>
+          <a:bodyPr wrap="square">
+            <a:spAutoFit/>
+          </a:bodyPr>
+          <a:lstStyle/>
+          <a:p>
+            <a:pPr algn="l">
+              <a:lnSpc>
+                <a:spcPct val="125000"/>
+              </a:lnSpc>
+            </a:pPr>
+            <a:r>
               <a:rPr sz="1000" b="0">
                 <a:solidFill>
                   <a:srgbClr val="8FA0B2"/>
                 </a:solidFill>
                 <a:latin typeface="Hiragino Sans"/>
               </a:rPr>
-              <a:t>11 / 14   docs/MODEL_INTERVENTIONS.md — 「盲信につながる修正は全部ここに載せる」</a:t>
+              <a:t>11 / 15   route_disclosure_edges.py / apply_disclosure_v2.py</a:t>
             </a:r>
           </a:p>
         </p:txBody>
@@ -4377,6 +4561,327 @@
 </file>
 
 <file path=ppt/slides/slide12.xml><?xml version="1.0" encoding="utf-8"?>
+<p:sld xmlns:a="http://schemas.openxmlformats.org/drawingml/2006/main" xmlns:p="http://schemas.openxmlformats.org/presentationml/2006/main" xmlns:r="http://schemas.openxmlformats.org/officeDocument/2006/relationships">
+  <p:cSld>
+    <p:spTree>
+      <p:nvGrpSpPr>
+        <p:cNvPr id="1" name=""/>
+        <p:cNvGrpSpPr/>
+        <p:nvPr/>
+      </p:nvGrpSpPr>
+      <p:grpSpPr/>
+      <p:sp>
+        <p:nvSpPr>
+          <p:cNvPr id="2" name="Rectangle 1"/>
+          <p:cNvSpPr/>
+          <p:nvPr/>
+        </p:nvSpPr>
+        <p:spPr>
+          <a:xfrm>
+            <a:off x="0" y="0"/>
+            <a:ext cx="12191695" cy="6858000"/>
+          </a:xfrm>
+          <a:prstGeom prst="rect">
+            <a:avLst/>
+          </a:prstGeom>
+          <a:solidFill>
+            <a:srgbClr val="0F1620"/>
+          </a:solidFill>
+          <a:ln>
+            <a:noFill/>
+          </a:ln>
+          <a:effectLst/>
+        </p:spPr>
+        <p:style>
+          <a:lnRef idx="1">
+            <a:schemeClr val="accent1"/>
+          </a:lnRef>
+          <a:fillRef idx="3">
+            <a:schemeClr val="accent1"/>
+          </a:fillRef>
+          <a:effectRef idx="2">
+            <a:schemeClr val="accent1"/>
+          </a:effectRef>
+          <a:fontRef idx="minor">
+            <a:schemeClr val="lt1"/>
+          </a:fontRef>
+        </p:style>
+        <p:txBody>
+          <a:bodyPr rtlCol="0" anchor="ctr"/>
+          <a:lstStyle/>
+          <a:p>
+            <a:pPr algn="ctr"/>
+          </a:p>
+        </p:txBody>
+      </p:sp>
+      <p:sp>
+        <p:nvSpPr>
+          <p:cNvPr id="3" name="TextBox 2"/>
+          <p:cNvSpPr txBox="1"/>
+          <p:nvPr/>
+        </p:nvSpPr>
+        <p:spPr>
+          <a:xfrm>
+            <a:off x="548640" y="292608"/>
+            <a:ext cx="10972800" cy="365760"/>
+          </a:xfrm>
+          <a:prstGeom prst="rect">
+            <a:avLst/>
+          </a:prstGeom>
+          <a:noFill/>
+        </p:spPr>
+        <p:txBody>
+          <a:bodyPr wrap="square">
+            <a:spAutoFit/>
+          </a:bodyPr>
+          <a:lstStyle/>
+          <a:p>
+            <a:pPr algn="l">
+              <a:lnSpc>
+                <a:spcPct val="125000"/>
+              </a:lnSpc>
+            </a:pPr>
+            <a:r>
+              <a:rPr sz="1300" b="1">
+                <a:solidFill>
+                  <a:srgbClr val="E0A13A"/>
+                </a:solidFill>
+                <a:latin typeface="Hiragino Sans"/>
+              </a:rPr>
+              <a:t>誠実性</a:t>
+            </a:r>
+          </a:p>
+        </p:txBody>
+      </p:sp>
+      <p:sp>
+        <p:nvSpPr>
+          <p:cNvPr id="4" name="TextBox 3"/>
+          <p:cNvSpPr txBox="1"/>
+          <p:nvPr/>
+        </p:nvSpPr>
+        <p:spPr>
+          <a:xfrm>
+            <a:off x="548640" y="640080"/>
+            <a:ext cx="10972800" cy="640080"/>
+          </a:xfrm>
+          <a:prstGeom prst="rect">
+            <a:avLst/>
+          </a:prstGeom>
+          <a:noFill/>
+        </p:spPr>
+        <p:txBody>
+          <a:bodyPr wrap="square">
+            <a:spAutoFit/>
+          </a:bodyPr>
+          <a:lstStyle/>
+          <a:p>
+            <a:pPr algn="l">
+              <a:lnSpc>
+                <a:spcPct val="125000"/>
+              </a:lnSpc>
+            </a:pPr>
+            <a:r>
+              <a:rPr sz="2800" b="1">
+                <a:solidFill>
+                  <a:srgbClr val="E9EDF2"/>
+                </a:solidFill>
+                <a:latin typeface="Hiragino Sans"/>
+              </a:rPr>
+              <a:t>滑らかさは、検証の証拠ではない</a:t>
+            </a:r>
+          </a:p>
+        </p:txBody>
+      </p:sp>
+      <p:sp>
+        <p:nvSpPr>
+          <p:cNvPr id="5" name="TextBox 4"/>
+          <p:cNvSpPr txBox="1"/>
+          <p:nvPr/>
+        </p:nvSpPr>
+        <p:spPr>
+          <a:xfrm>
+            <a:off x="548640" y="1463040"/>
+            <a:ext cx="10972800" cy="548640"/>
+          </a:xfrm>
+          <a:prstGeom prst="rect">
+            <a:avLst/>
+          </a:prstGeom>
+          <a:noFill/>
+        </p:spPr>
+        <p:txBody>
+          <a:bodyPr wrap="square">
+            <a:spAutoFit/>
+          </a:bodyPr>
+          <a:lstStyle/>
+          <a:p>
+            <a:pPr algn="l">
+              <a:lnSpc>
+                <a:spcPct val="125000"/>
+              </a:lnSpc>
+            </a:pPr>
+            <a:r>
+              <a:rPr sz="1400" b="0">
+                <a:solidFill>
+                  <a:srgbClr val="8FA0B2"/>
+                </a:solidFill>
+                <a:latin typeface="Hiragino Sans"/>
+              </a:rPr>
+              <a:t>完成品の見栄えは「仮定を重ねた推定」を「実在の観測」と誤認させる。だから仮定の全量を1枚の台帳で見えるようにする。</a:t>
+            </a:r>
+          </a:p>
+        </p:txBody>
+      </p:sp>
+      <p:sp>
+        <p:nvSpPr>
+          <p:cNvPr id="6" name="TextBox 5"/>
+          <p:cNvSpPr txBox="1"/>
+          <p:nvPr/>
+        </p:nvSpPr>
+        <p:spPr>
+          <a:xfrm>
+            <a:off x="548640" y="2286000"/>
+            <a:ext cx="10972800" cy="3657600"/>
+          </a:xfrm>
+          <a:prstGeom prst="rect">
+            <a:avLst/>
+          </a:prstGeom>
+          <a:noFill/>
+        </p:spPr>
+        <p:txBody>
+          <a:bodyPr wrap="square">
+            <a:spAutoFit/>
+          </a:bodyPr>
+          <a:lstStyle/>
+          <a:p>
+            <a:pPr>
+              <a:lnSpc>
+                <a:spcPct val="130000"/>
+              </a:lnSpc>
+            </a:pPr>
+            <a:r>
+              <a:rPr sz="1400">
+                <a:solidFill>
+                  <a:srgbClr val="E9EDF2"/>
+                </a:solidFill>
+                <a:latin typeface="Hiragino Sans"/>
+              </a:rPr>
+              <a:t>・介入台帳 — 接続・値・配分を作る介入30件すべてを ①根拠 ②帳簿 ③無効化手段 の3点セットで登録(登録なき介入は禁止)</a:t>
+            </a:r>
+          </a:p>
+          <a:p>
+            <a:pPr>
+              <a:lnSpc>
+                <a:spcPct val="130000"/>
+              </a:lnSpc>
+            </a:pPr>
+            <a:r>
+              <a:rPr sz="1400">
+                <a:solidFill>
+                  <a:srgbClr val="E9EDF2"/>
+                </a:solidFill>
+                <a:latin typeface="Hiragino Sans"/>
+              </a:rPr>
+              <a:t>・出典必須 — 容量・接続は出典URL+原文引用がないものをREJECT。動的定数は「型式別典型値・個別実測でない」と列で明示</a:t>
+            </a:r>
+          </a:p>
+          <a:p>
+            <a:pPr>
+              <a:lnSpc>
+                <a:spcPct val="130000"/>
+              </a:lnSpc>
+            </a:pPr>
+            <a:r>
+              <a:rPr sz="1400">
+                <a:solidFill>
+                  <a:srgbClr val="E9EDF2"/>
+                </a:solidFill>
+                <a:latin typeface="Hiragino Sans"/>
+              </a:rPr>
+              <a:t>・負の結果 — 失敗・棄却した仮説も検証図つきで報告に残す</a:t>
+            </a:r>
+          </a:p>
+          <a:p>
+            <a:pPr>
+              <a:lnSpc>
+                <a:spcPct val="130000"/>
+              </a:lnSpc>
+            </a:pPr>
+            <a:r>
+              <a:rPr sz="1400">
+                <a:solidFill>
+                  <a:srgbClr val="E9EDF2"/>
+                </a:solidFill>
+                <a:latin typeface="Hiragino Sans"/>
+              </a:rPr>
+              <a:t>・A/B保留 — 効果が測れない改良は採用しない(例: 地点需要ピン留め=害なし・カバレッジ0.3%で保留)</a:t>
+            </a:r>
+          </a:p>
+          <a:p>
+            <a:pPr>
+              <a:lnSpc>
+                <a:spcPct val="130000"/>
+              </a:lnSpc>
+            </a:pPr>
+            <a:r>
+              <a:rPr sz="1400">
+                <a:solidFill>
+                  <a:srgbClr val="E9EDF2"/>
+                </a:solidFill>
+                <a:latin typeface="Hiragino Sans"/>
+              </a:rPr>
+              <a:t>・近似の明示 — 長軸振動は「帯と形の再現」。減衰率の定量にはAVR/PSS/ガバナの制御系モデルが要る(未実装と明記)</a:t>
+            </a:r>
+          </a:p>
+        </p:txBody>
+      </p:sp>
+      <p:sp>
+        <p:nvSpPr>
+          <p:cNvPr id="7" name="TextBox 6"/>
+          <p:cNvSpPr txBox="1"/>
+          <p:nvPr/>
+        </p:nvSpPr>
+        <p:spPr>
+          <a:xfrm>
+            <a:off x="548640" y="6419088"/>
+            <a:ext cx="11155680" cy="365760"/>
+          </a:xfrm>
+          <a:prstGeom prst="rect">
+            <a:avLst/>
+          </a:prstGeom>
+          <a:noFill/>
+        </p:spPr>
+        <p:txBody>
+          <a:bodyPr wrap="square">
+            <a:spAutoFit/>
+          </a:bodyPr>
+          <a:lstStyle/>
+          <a:p>
+            <a:pPr algn="l">
+              <a:lnSpc>
+                <a:spcPct val="125000"/>
+              </a:lnSpc>
+            </a:pPr>
+            <a:r>
+              <a:rPr sz="1000" b="0">
+                <a:solidFill>
+                  <a:srgbClr val="8FA0B2"/>
+                </a:solidFill>
+                <a:latin typeface="Hiragino Sans"/>
+              </a:rPr>
+              <a:t>12 / 15   docs/MODEL_INTERVENTIONS.md — 「盲信につながる修正は全部ここに載せる」</a:t>
+            </a:r>
+          </a:p>
+        </p:txBody>
+      </p:sp>
+    </p:spTree>
+  </p:cSld>
+  <p:clrMapOvr>
+    <a:masterClrMapping/>
+  </p:clrMapOvr>
+</p:sld>
+</file>
+
+<file path=ppt/slides/slide13.xml><?xml version="1.0" encoding="utf-8"?>
 <p:sld xmlns:a="http://schemas.openxmlformats.org/drawingml/2006/main" xmlns:p="http://schemas.openxmlformats.org/presentationml/2006/main" xmlns:r="http://schemas.openxmlformats.org/officeDocument/2006/relationships">
   <p:cSld>
     <p:spTree>
@@ -5041,7 +5546,7 @@
                 </a:solidFill>
                 <a:latin typeface="Hiragino Sans"/>
               </a:rPr>
-              <a:t>12 / 14   ZIP負荷: P(V)=P₀(aV²+bV+c)</a:t>
+              <a:t>13 / 15   ZIP負荷: P(V)=P₀(aV²+bV+c)</a:t>
             </a:r>
           </a:p>
         </p:txBody>
@@ -5054,7 +5559,7 @@
 </p:sld>
 </file>
 
-<file path=ppt/slides/slide13.xml><?xml version="1.0" encoding="utf-8"?>
+<file path=ppt/slides/slide14.xml><?xml version="1.0" encoding="utf-8"?>
 <p:sld xmlns:a="http://schemas.openxmlformats.org/drawingml/2006/main" xmlns:p="http://schemas.openxmlformats.org/presentationml/2006/main" xmlns:r="http://schemas.openxmlformats.org/officeDocument/2006/relationships">
   <p:cSld>
     <p:spTree>
@@ -5652,7 +6157,7 @@
                 </a:solidFill>
                 <a:latin typeface="Hiragino Sans"/>
               </a:rPr>
-              <a:t>13 / 14   先例: FNET/GridEye(米)。日本の分散PMU網は未開拓</a:t>
+              <a:t>14 / 15   先例: FNET/GridEye(米)。日本の分散PMU網は未開拓</a:t>
             </a:r>
           </a:p>
         </p:txBody>
@@ -5665,7 +6170,7 @@
 </p:sld>
 </file>
 
-<file path=ppt/slides/slide14.xml><?xml version="1.0" encoding="utf-8"?>
+<file path=ppt/slides/slide15.xml><?xml version="1.0" encoding="utf-8"?>
 <p:sld xmlns:a="http://schemas.openxmlformats.org/drawingml/2006/main" xmlns:p="http://schemas.openxmlformats.org/presentationml/2006/main" xmlns:r="http://schemas.openxmlformats.org/officeDocument/2006/relationships">
   <p:cSld>
     <p:spTree>
@@ -6198,7 +6703,7 @@
                 </a:solidFill>
                 <a:latin typeface="Hiragino Sans"/>
               </a:rPr>
-              <a:t>14 / 14   All-Japan-Grid 動的検証キャンペーン 2026-08</a:t>
+              <a:t>15 / 15   All-Japan-Grid 動的検証キャンペーン 2026-08</a:t>
             </a:r>
           </a:p>
         </p:txBody>
@@ -6745,7 +7250,7 @@
                 </a:solidFill>
                 <a:latin typeface="Hiragino Sans"/>
               </a:rPr>
-              <a:t>02 / 14   Yはpandapower/pypower makeYbus(業界標準実装)・出荷v5.0.1</a:t>
+              <a:t>02 / 15   Yはpandapower/pypower makeYbus(業界標準実装)・出荷v5.0.1</a:t>
             </a:r>
           </a:p>
         </p:txBody>
@@ -7480,7 +7985,7 @@
                 </a:solidFill>
                 <a:latin typeface="Hiragino Sans"/>
               </a:rPr>
-              <a:t>03 / 14   検証4点セット</a:t>
+              <a:t>03 / 15   検証4点セット</a:t>
             </a:r>
           </a:p>
         </p:txBody>
@@ -7843,7 +8348,7 @@
                 </a:solidFill>
                 <a:latin typeface="Hiragino Sans"/>
               </a:rPr>
-              <a:t>04 / 14   観測=observed層としてderived(解析値)と分離管理</a:t>
+              <a:t>04 / 15   観測=observed層としてderived(解析値)と分離管理</a:t>
             </a:r>
           </a:p>
         </p:txBody>
@@ -8314,7 +8819,7 @@
                 </a:solidFill>
                 <a:latin typeface="Hiragino Sans"/>
               </a:rPr>
-              <a:t>05 / 14   gen_grid_strength_map.py — 機械はG表(号機×型式別典型値)から</a:t>
+              <a:t>05 / 15   gen_grid_strength_map.py — 機械はG表(号機×型式別典型値)から</a:t>
             </a:r>
           </a:p>
         </p:txBody>
@@ -8620,7 +9125,7 @@
                 </a:solidFill>
                 <a:latin typeface="Hiragino Sans"/>
               </a:rPr>
-              <a:t>06 / 14   初回の非物理値(119GVA)は出荷Ybusの単位表記バグを検算で発見→v5.0.1修正</a:t>
+              <a:t>06 / 15   初回の非物理値(119GVA)は出荷Ybusの単位表記バグを検算で発見→v5.0.1修正</a:t>
             </a:r>
           </a:p>
         </p:txBody>
@@ -9085,7 +9590,7 @@
                 </a:solidFill>
                 <a:latin typeface="Hiragino Sans"/>
               </a:rPr>
-              <a:t>07 / 14   src/dynamics/machine_agg.py</a:t>
+              <a:t>07 / 15   src/dynamics/machine_agg.py</a:t>
             </a:r>
           </a:p>
         </p:txBody>
@@ -9375,7 +9880,7 @@
                 </a:solidFill>
                 <a:latin typeface="Hiragino Sans"/>
               </a:rPr>
-              <a:t>08 / 14   gen_swing_map.py — 運転点は本番前処理フルセット(介入#19/#20/#24/#26既定込み)</a:t>
+              <a:t>08 / 15   gen_swing_map.py — 運転点は本番前処理フルセット(介入#19/#20/#24/#26既定込み)</a:t>
             </a:r>
           </a:p>
         </p:txBody>
@@ -9476,21 +9981,84 @@
                 </a:solidFill>
                 <a:latin typeface="Hiragino Sans"/>
               </a:rPr>
-              <a:t>ヘッドライン</a:t>
-            </a:r>
-          </a:p>
-        </p:txBody>
-      </p:sp>
-      <p:sp>
-        <p:nvSpPr>
-          <p:cNvPr id="4" name="Rectangle 3"/>
+              <a:t>結果 III  PV有無×UC — 慣性の日内変動</a:t>
+            </a:r>
+          </a:p>
+        </p:txBody>
+      </p:sp>
+      <p:sp>
+        <p:nvSpPr>
+          <p:cNvPr id="4" name="TextBox 3"/>
+          <p:cNvSpPr txBox="1"/>
+          <p:nvPr/>
+        </p:nvSpPr>
+        <p:spPr>
+          <a:xfrm>
+            <a:off x="548640" y="640080"/>
+            <a:ext cx="10972800" cy="640080"/>
+          </a:xfrm>
+          <a:prstGeom prst="rect">
+            <a:avLst/>
+          </a:prstGeom>
+          <a:noFill/>
+        </p:spPr>
+        <p:txBody>
+          <a:bodyPr wrap="square">
+            <a:spAutoFit/>
+          </a:bodyPr>
+          <a:lstStyle/>
+          <a:p>
+            <a:pPr algn="l">
+              <a:lnSpc>
+                <a:spcPct val="125000"/>
+              </a:lnSpc>
+            </a:pPr>
+            <a:r>
+              <a:rPr sz="2600" b="1">
+                <a:solidFill>
+                  <a:srgbClr val="E9EDF2"/>
+                </a:solidFill>
+                <a:latin typeface="Hiragino Sans"/>
+              </a:rPr>
+              <a:t>太陽は同期機を止め、系統の慣性を昼に沈める</a:t>
+            </a:r>
+          </a:p>
+        </p:txBody>
+      </p:sp>
+      <p:pic>
+        <p:nvPicPr>
+          <p:cNvPr id="5" name="Picture 4" descr="fig_pv_inertia_slide.jpg"/>
+          <p:cNvPicPr>
+            <a:picLocks noChangeAspect="1"/>
+          </p:cNvPicPr>
+          <p:nvPr/>
+        </p:nvPicPr>
+        <p:blipFill>
+          <a:blip r:embed="rId2"/>
+          <a:stretch>
+            <a:fillRect/>
+          </a:stretch>
+        </p:blipFill>
+        <p:spPr>
+          <a:xfrm>
+            <a:off x="457200" y="1463040"/>
+            <a:ext cx="7863840" cy="3360481"/>
+          </a:xfrm>
+          <a:prstGeom prst="rect">
+            <a:avLst/>
+          </a:prstGeom>
+        </p:spPr>
+      </p:pic>
+      <p:sp>
+        <p:nvSpPr>
+          <p:cNvPr id="6" name="Rectangle 5"/>
           <p:cNvSpPr/>
           <p:nvPr/>
         </p:nvSpPr>
         <p:spPr>
           <a:xfrm>
-            <a:off x="731520" y="1463040"/>
-            <a:ext cx="10698480" cy="2377440"/>
+            <a:off x="8503920" y="1554480"/>
+            <a:ext cx="3200400" cy="1207008"/>
           </a:xfrm>
           <a:prstGeom prst="rect">
             <a:avLst/>
@@ -9520,68 +10088,43 @@
           </a:fontRef>
         </p:style>
         <p:txBody>
-          <a:bodyPr rtlCol="0" anchor="ctr" wrap="square" lIns="365760" tIns="320040"/>
-          <a:lstStyle/>
-          <a:p>
-            <a:pPr algn="ctr">
-              <a:lnSpc>
-                <a:spcPct val="135000"/>
-              </a:lnSpc>
-            </a:pPr>
-            <a:r>
-              <a:rPr sz="2400" b="1">
-                <a:solidFill>
-                  <a:srgbClr val="E9EDF2"/>
-                </a:solidFill>
-                <a:latin typeface="Hiragino Sans"/>
-              </a:rPr>
-              <a:t>公開データのみから構築した全国送電網モデルが、</a:t>
-            </a:r>
-          </a:p>
-          <a:p>
-            <a:pPr>
-              <a:lnSpc>
-                <a:spcPct val="135000"/>
-              </a:lnSpc>
-            </a:pPr>
-            <a:r>
-              <a:rPr sz="2400" b="1">
+          <a:bodyPr rtlCol="0" anchor="ctr" wrap="square" lIns="228600" tIns="109728"/>
+          <a:lstStyle/>
+          <a:p>
+            <a:pPr algn="ctr"/>
+            <a:r>
+              <a:rPr sz="1600" b="1">
                 <a:solidFill>
                   <a:srgbClr val="E0A13A"/>
                 </a:solidFill>
-                <a:latin typeface="Hiragino Sans"/>
-              </a:rPr>
-              <a:t>実測で知られる西日本長軸振動(約0.4Hz)の</a:t>
-            </a:r>
-          </a:p>
-          <a:p>
-            <a:pPr>
-              <a:lnSpc>
-                <a:spcPct val="135000"/>
-              </a:lnSpc>
-            </a:pPr>
-            <a:r>
-              <a:rPr sz="2400" b="1">
-                <a:solidFill>
-                  <a:srgbClr val="E9EDF2"/>
-                </a:solidFill>
-                <a:latin typeface="Hiragino Sans"/>
-              </a:rPr>
-              <a:t>周波数と地理形状を再現した。</a:t>
-            </a:r>
-          </a:p>
-        </p:txBody>
-      </p:sp>
-      <p:sp>
-        <p:nvSpPr>
-          <p:cNvPr id="5" name="TextBox 4"/>
+                <a:latin typeface="Cambria Math"/>
+              </a:rPr>
+              <a:t>ROCOF = ΔP·f₀ / 2Ek</a:t>
+            </a:r>
+          </a:p>
+          <a:p>
+            <a:r>
+              <a:rPr sz="1050">
+                <a:solidFill>
+                  <a:srgbClr val="8FA0B2"/>
+                </a:solidFill>
+                <a:latin typeface="Hiragino Sans"/>
+              </a:rPr>
+              <a:t>正午にPVが46GWの同期機を止め Ek east−21%/west−26% → 1GW脱落時の周波数低下速度+27〜36%悪化</a:t>
+            </a:r>
+          </a:p>
+        </p:txBody>
+      </p:sp>
+      <p:sp>
+        <p:nvSpPr>
+          <p:cNvPr id="7" name="TextBox 6"/>
           <p:cNvSpPr txBox="1"/>
           <p:nvPr/>
         </p:nvSpPr>
         <p:spPr>
           <a:xfrm>
-            <a:off x="777240" y="4114800"/>
-            <a:ext cx="10515600" cy="548640"/>
+            <a:off x="8503920" y="3383280"/>
+            <a:ext cx="3200400" cy="3657600"/>
           </a:xfrm>
           <a:prstGeom prst="rect">
             <a:avLst/>
@@ -9594,33 +10137,49 @@
           </a:bodyPr>
           <a:lstStyle/>
           <a:p>
-            <a:pPr algn="l">
-              <a:lnSpc>
-                <a:spcPct val="125000"/>
-              </a:lnSpc>
-            </a:pPr>
-            <a:r>
-              <a:rPr sz="1300" b="0">
-                <a:solidFill>
-                  <a:srgbClr val="8FA0B2"/>
-                </a:solidFill>
-                <a:latin typeface="Hiragino Sans"/>
-              </a:rPr>
-              <a:t>周波数だけでなく「九州⇔中部・関西の逆位相」という形まで一致 — トポロジ・インピーダンス・慣性配置がまとめて本物らしいことの証明。</a:t>
-            </a:r>
-          </a:p>
-        </p:txBody>
-      </p:sp>
-      <p:sp>
-        <p:nvSpPr>
-          <p:cNvPr id="6" name="TextBox 5"/>
+            <a:pPr>
+              <a:lnSpc>
+                <a:spcPct val="130000"/>
+              </a:lnSpc>
+            </a:pPr>
+            <a:r>
+              <a:rPr sz="1100">
+                <a:solidFill>
+                  <a:srgbClr val="E9EDF2"/>
+                </a:solidFill>
+                <a:latin typeface="Hiragino Sans"/>
+              </a:rPr>
+              <a:t>・モード周波数はほぼ不変 — KとMが同率に減るため(正しい物理)。効くのはROCOF</a:t>
+            </a:r>
+          </a:p>
+          <a:p>
+            <a:pPr>
+              <a:lnSpc>
+                <a:spcPct val="130000"/>
+              </a:lnSpc>
+            </a:pPr>
+            <a:r>
+              <a:rPr sz="1100">
+                <a:solidFill>
+                  <a:srgbClr val="E9EDF2"/>
+                </a:solidFill>
+                <a:latin typeface="Hiragino Sans"/>
+              </a:rPr>
+              <a:t>・夜明け前の慣性最小・夕方ランプ(ダックカーブ裏面)も出現</a:t>
+            </a:r>
+          </a:p>
+        </p:txBody>
+      </p:sp>
+      <p:sp>
+        <p:nvSpPr>
+          <p:cNvPr id="8" name="TextBox 7"/>
           <p:cNvSpPr txBox="1"/>
           <p:nvPr/>
         </p:nvSpPr>
         <p:spPr>
           <a:xfrm>
-            <a:off x="548640" y="4937760"/>
-            <a:ext cx="2743200" cy="640080"/>
+            <a:off x="548640" y="6419088"/>
+            <a:ext cx="11155680" cy="365760"/>
           </a:xfrm>
           <a:prstGeom prst="rect">
             <a:avLst/>
@@ -9639,247 +10198,13 @@
               </a:lnSpc>
             </a:pPr>
             <a:r>
-              <a:rPr sz="2600" b="1">
-                <a:solidFill>
-                  <a:srgbClr val="4F9FD8"/>
-                </a:solidFill>
-                <a:latin typeface="Hiragino Sans"/>
-              </a:rPr>
-              <a:t>0.434 Hz</a:t>
-            </a:r>
-          </a:p>
-        </p:txBody>
-      </p:sp>
-      <p:sp>
-        <p:nvSpPr>
-          <p:cNvPr id="7" name="TextBox 6"/>
-          <p:cNvSpPr txBox="1"/>
-          <p:nvPr/>
-        </p:nvSpPr>
-        <p:spPr>
-          <a:xfrm>
-            <a:off x="548640" y="5532120"/>
-            <a:ext cx="2743200" cy="365760"/>
-          </a:xfrm>
-          <a:prstGeom prst="rect">
-            <a:avLst/>
-          </a:prstGeom>
-          <a:noFill/>
-        </p:spPr>
-        <p:txBody>
-          <a:bodyPr wrap="square">
-            <a:spAutoFit/>
-          </a:bodyPr>
-          <a:lstStyle/>
-          <a:p>
-            <a:pPr algn="l">
-              <a:lnSpc>
-                <a:spcPct val="125000"/>
-              </a:lnSpc>
-            </a:pPr>
-            <a:r>
-              <a:rPr sz="1200" b="0">
+              <a:rPr sz="1000" b="0">
                 <a:solidFill>
                   <a:srgbClr val="8FA0B2"/>
                 </a:solidFill>
                 <a:latin typeface="Hiragino Sans"/>
               </a:rPr>
-              <a:t>west 最低モード(文献≈0.4Hz)</a:t>
-            </a:r>
-          </a:p>
-        </p:txBody>
-      </p:sp>
-      <p:sp>
-        <p:nvSpPr>
-          <p:cNvPr id="8" name="TextBox 7"/>
-          <p:cNvSpPr txBox="1"/>
-          <p:nvPr/>
-        </p:nvSpPr>
-        <p:spPr>
-          <a:xfrm>
-            <a:off x="4297679" y="4937760"/>
-            <a:ext cx="2743200" cy="640080"/>
-          </a:xfrm>
-          <a:prstGeom prst="rect">
-            <a:avLst/>
-          </a:prstGeom>
-          <a:noFill/>
-        </p:spPr>
-        <p:txBody>
-          <a:bodyPr wrap="square">
-            <a:spAutoFit/>
-          </a:bodyPr>
-          <a:lstStyle/>
-          <a:p>
-            <a:pPr algn="l">
-              <a:lnSpc>
-                <a:spcPct val="125000"/>
-              </a:lnSpc>
-            </a:pPr>
-            <a:r>
-              <a:rPr sz="2600" b="1">
-                <a:solidFill>
-                  <a:srgbClr val="E4572E"/>
-                </a:solidFill>
-                <a:latin typeface="Hiragino Sans"/>
-              </a:rPr>
-              <a:t>0.592 Hz</a:t>
-            </a:r>
-          </a:p>
-        </p:txBody>
-      </p:sp>
-      <p:sp>
-        <p:nvSpPr>
-          <p:cNvPr id="9" name="TextBox 8"/>
-          <p:cNvSpPr txBox="1"/>
-          <p:nvPr/>
-        </p:nvSpPr>
-        <p:spPr>
-          <a:xfrm>
-            <a:off x="4297679" y="5532120"/>
-            <a:ext cx="2743200" cy="365760"/>
-          </a:xfrm>
-          <a:prstGeom prst="rect">
-            <a:avLst/>
-          </a:prstGeom>
-          <a:noFill/>
-        </p:spPr>
-        <p:txBody>
-          <a:bodyPr wrap="square">
-            <a:spAutoFit/>
-          </a:bodyPr>
-          <a:lstStyle/>
-          <a:p>
-            <a:pPr algn="l">
-              <a:lnSpc>
-                <a:spcPct val="125000"/>
-              </a:lnSpc>
-            </a:pPr>
-            <a:r>
-              <a:rPr sz="1200" b="0">
-                <a:solidFill>
-                  <a:srgbClr val="8FA0B2"/>
-                </a:solidFill>
-                <a:latin typeface="Hiragino Sans"/>
-              </a:rPr>
-              <a:t>east 最低モード(東北⇔関東)</a:t>
-            </a:r>
-          </a:p>
-        </p:txBody>
-      </p:sp>
-      <p:sp>
-        <p:nvSpPr>
-          <p:cNvPr id="10" name="TextBox 9"/>
-          <p:cNvSpPr txBox="1"/>
-          <p:nvPr/>
-        </p:nvSpPr>
-        <p:spPr>
-          <a:xfrm>
-            <a:off x="8046719" y="4937760"/>
-            <a:ext cx="2743200" cy="640080"/>
-          </a:xfrm>
-          <a:prstGeom prst="rect">
-            <a:avLst/>
-          </a:prstGeom>
-          <a:noFill/>
-        </p:spPr>
-        <p:txBody>
-          <a:bodyPr wrap="square">
-            <a:spAutoFit/>
-          </a:bodyPr>
-          <a:lstStyle/>
-          <a:p>
-            <a:pPr algn="l">
-              <a:lnSpc>
-                <a:spcPct val="125000"/>
-              </a:lnSpc>
-            </a:pPr>
-            <a:r>
-              <a:rPr sz="2600" b="1">
-                <a:solidFill>
-                  <a:srgbClr val="E0A13A"/>
-                </a:solidFill>
-                <a:latin typeface="Hiragino Sans"/>
-              </a:rPr>
-              <a:t>409機</a:t>
-            </a:r>
-          </a:p>
-        </p:txBody>
-      </p:sp>
-      <p:sp>
-        <p:nvSpPr>
-          <p:cNvPr id="11" name="TextBox 10"/>
-          <p:cNvSpPr txBox="1"/>
-          <p:nvPr/>
-        </p:nvSpPr>
-        <p:spPr>
-          <a:xfrm>
-            <a:off x="8046719" y="5532120"/>
-            <a:ext cx="2743200" cy="365760"/>
-          </a:xfrm>
-          <a:prstGeom prst="rect">
-            <a:avLst/>
-          </a:prstGeom>
-          <a:noFill/>
-        </p:spPr>
-        <p:txBody>
-          <a:bodyPr wrap="square">
-            <a:spAutoFit/>
-          </a:bodyPr>
-          <a:lstStyle/>
-          <a:p>
-            <a:pPr algn="l">
-              <a:lnSpc>
-                <a:spcPct val="125000"/>
-              </a:lnSpc>
-            </a:pPr>
-            <a:r>
-              <a:rPr sz="1200" b="0">
-                <a:solidFill>
-                  <a:srgbClr val="8FA0B2"/>
-                </a:solidFill>
-                <a:latin typeface="Hiragino Sans"/>
-              </a:rPr>
-              <a:t>west 同期機(集約後)</a:t>
-            </a:r>
-          </a:p>
-        </p:txBody>
-      </p:sp>
-      <p:sp>
-        <p:nvSpPr>
-          <p:cNvPr id="12" name="TextBox 11"/>
-          <p:cNvSpPr txBox="1"/>
-          <p:nvPr/>
-        </p:nvSpPr>
-        <p:spPr>
-          <a:xfrm>
-            <a:off x="548640" y="6419088"/>
-            <a:ext cx="11155680" cy="365760"/>
-          </a:xfrm>
-          <a:prstGeom prst="rect">
-            <a:avLst/>
-          </a:prstGeom>
-          <a:noFill/>
-        </p:spPr>
-        <p:txBody>
-          <a:bodyPr wrap="square">
-            <a:spAutoFit/>
-          </a:bodyPr>
-          <a:lstStyle/>
-          <a:p>
-            <a:pPr algn="l">
-              <a:lnSpc>
-                <a:spcPct val="125000"/>
-              </a:lnSpc>
-            </a:pPr>
-            <a:r>
-              <a:rPr sz="1000" b="0">
-                <a:solidFill>
-                  <a:srgbClr val="8FA0B2"/>
-                </a:solidFill>
-                <a:latin typeface="Hiragino Sans"/>
-              </a:rPr>
-              <a:t>09 / 14   再現: PYTHONPATH=. python3 scripts/gen_swing_map.py</a:t>
+              <a:t>09 / 15   uc_pv_compare.py → pv_dynamics_compare.py(容量比例ブリッジ・開示済)</a:t>
             </a:r>
           </a:p>
         </p:txBody>
